--- a/就活帳.pptx
+++ b/就活帳.pptx
@@ -5,10 +5,10 @@
     <p:sldMasterId id="2147483775" r:id="rId4"/>
   </p:sldMasterIdLst>
   <p:notesMasterIdLst>
-    <p:notesMasterId r:id="rId17"/>
+    <p:notesMasterId r:id="rId20"/>
   </p:notesMasterIdLst>
   <p:handoutMasterIdLst>
-    <p:handoutMasterId r:id="rId18"/>
+    <p:handoutMasterId r:id="rId21"/>
   </p:handoutMasterIdLst>
   <p:sldIdLst>
     <p:sldId id="2549" r:id="rId5"/>
@@ -21,8 +21,11 @@
     <p:sldId id="2555" r:id="rId12"/>
     <p:sldId id="2538" r:id="rId13"/>
     <p:sldId id="2562" r:id="rId14"/>
-    <p:sldId id="2556" r:id="rId15"/>
-    <p:sldId id="2560" r:id="rId16"/>
+    <p:sldId id="2564" r:id="rId15"/>
+    <p:sldId id="2565" r:id="rId16"/>
+    <p:sldId id="2556" r:id="rId17"/>
+    <p:sldId id="2563" r:id="rId18"/>
+    <p:sldId id="2560" r:id="rId19"/>
   </p:sldIdLst>
   <p:sldSz cx="12192000" cy="6858000"/>
   <p:notesSz cx="6858000" cy="9144000"/>
@@ -10357,7 +10360,7 @@
                 <a:latin typeface="Meiryo UI" panose="020B0604030504040204" pitchFamily="50" charset="-128"/>
                 <a:ea typeface="Meiryo UI" panose="020B0604030504040204" pitchFamily="50" charset="-128"/>
               </a:rPr>
-              <a:t>2026/5/13</a:t>
+              <a:t>2026/7/15</a:t>
             </a:fld>
             <a:endParaRPr lang="ja-JP" altLang="en-US" dirty="0">
               <a:latin typeface="Meiryo UI" panose="020B0604030504040204" pitchFamily="50" charset="-128"/>
@@ -10466,7 +10469,7 @@
             <a:fld id="{07D51A45-A245-435C-8F35-5134122F7907}" type="datetime1">
               <a:rPr lang="ja-JP" altLang="en-US" smtClean="0"/>
               <a:pPr/>
-              <a:t>2026/5/13</a:t>
+              <a:t>2026/7/15</a:t>
             </a:fld>
             <a:endParaRPr lang="ja-JP" altLang="en-US" dirty="0"/>
           </a:p>
@@ -10941,7 +10944,7 @@
                 <a:latin typeface="Meiryo UI" panose="020B0604030504040204" pitchFamily="50" charset="-128"/>
                 <a:ea typeface="Meiryo UI" panose="020B0604030504040204" pitchFamily="50" charset="-128"/>
               </a:rPr>
-              <a:t>11</a:t>
+              <a:t>13</a:t>
             </a:fld>
             <a:endParaRPr lang="ja-JP" altLang="en-US" dirty="0">
               <a:latin typeface="Meiryo UI" panose="020B0604030504040204" pitchFamily="50" charset="-128"/>
@@ -11036,7 +11039,7 @@
                 <a:latin typeface="Meiryo UI" panose="020B0604030504040204" pitchFamily="50" charset="-128"/>
                 <a:ea typeface="Meiryo UI" panose="020B0604030504040204" pitchFamily="50" charset="-128"/>
               </a:rPr>
-              <a:t>12</a:t>
+              <a:t>15</a:t>
             </a:fld>
             <a:endParaRPr lang="ja-JP" altLang="en-US" dirty="0">
               <a:latin typeface="Meiryo UI" panose="020B0604030504040204" pitchFamily="50" charset="-128"/>
@@ -11897,7 +11900,7 @@
           <a:p>
             <a:fld id="{AD17211D-9D5D-48DC-B274-CD86044526E1}" type="datetime1">
               <a:rPr lang="ja-JP" altLang="en-US" noProof="0" smtClean="0"/>
-              <a:t>2026/5/13</a:t>
+              <a:t>2026/7/15</a:t>
             </a:fld>
             <a:endParaRPr lang="ja-JP" altLang="en-US" noProof="0" dirty="0"/>
           </a:p>
@@ -12672,7 +12675,7 @@
           <a:p>
             <a:fld id="{92DC27CF-897A-4897-AE1C-CFE381BB08BC}" type="datetime1">
               <a:rPr lang="ja-JP" altLang="en-US" noProof="0" smtClean="0"/>
-              <a:t>2026/5/13</a:t>
+              <a:t>2026/7/15</a:t>
             </a:fld>
             <a:endParaRPr lang="ja-JP" altLang="en-US" noProof="0" dirty="0"/>
           </a:p>
@@ -13322,7 +13325,7 @@
           <a:p>
             <a:fld id="{3923C490-EFE6-4945-8A25-7D8E084634B7}" type="datetime1">
               <a:rPr lang="ja-JP" altLang="en-US" noProof="0" smtClean="0"/>
-              <a:t>2026/5/13</a:t>
+              <a:t>2026/7/15</a:t>
             </a:fld>
             <a:endParaRPr lang="ja-JP" altLang="en-US" noProof="0" dirty="0"/>
           </a:p>
@@ -14060,7 +14063,7 @@
           <a:p>
             <a:fld id="{0F2CABB7-8058-4BE5-A1C2-E4F0837BC1C9}" type="datetime1">
               <a:rPr lang="ja-JP" altLang="en-US" noProof="0" smtClean="0"/>
-              <a:t>2026/5/13</a:t>
+              <a:t>2026/7/15</a:t>
             </a:fld>
             <a:endParaRPr lang="ja-JP" altLang="en-US" noProof="0" dirty="0"/>
           </a:p>
@@ -14849,7 +14852,7 @@
           <a:p>
             <a:fld id="{9D40CA02-4D60-47F7-B19D-281B870DBC1E}" type="datetime1">
               <a:rPr lang="ja-JP" altLang="en-US" noProof="0" smtClean="0"/>
-              <a:t>2026/5/13</a:t>
+              <a:t>2026/7/15</a:t>
             </a:fld>
             <a:endParaRPr lang="ja-JP" altLang="en-US" noProof="0" dirty="0"/>
           </a:p>
@@ -16266,7 +16269,7 @@
           <a:p>
             <a:fld id="{F53727C9-9A56-4203-BBB0-3227A530C8A0}" type="datetime1">
               <a:rPr lang="ja-JP" altLang="en-US" noProof="0" smtClean="0"/>
-              <a:t>2026/5/13</a:t>
+              <a:t>2026/7/15</a:t>
             </a:fld>
             <a:endParaRPr lang="ja-JP" altLang="en-US" noProof="0" dirty="0"/>
           </a:p>
@@ -16834,7 +16837,7 @@
           <a:p>
             <a:fld id="{0C529E7D-1EE5-4AA2-B446-31EA12DCE890}" type="datetime1">
               <a:rPr lang="ja-JP" altLang="en-US" noProof="0" smtClean="0"/>
-              <a:t>2026/5/13</a:t>
+              <a:t>2026/7/15</a:t>
             </a:fld>
             <a:endParaRPr lang="ja-JP" altLang="en-US" noProof="0" dirty="0"/>
           </a:p>
@@ -17548,7 +17551,7 @@
           <a:p>
             <a:fld id="{1C5E60B7-06DE-44E6-8596-5E17C8D2402D}" type="datetime1">
               <a:rPr lang="ja-JP" altLang="en-US" noProof="0" smtClean="0"/>
-              <a:t>2026/5/13</a:t>
+              <a:t>2026/7/15</a:t>
             </a:fld>
             <a:endParaRPr lang="ja-JP" altLang="en-US" noProof="0" dirty="0"/>
           </a:p>
@@ -17893,7 +17896,7 @@
           <a:p>
             <a:fld id="{05F07B77-F511-42E4-82DF-F3192ED8B60A}" type="datetime1">
               <a:rPr lang="ja-JP" altLang="en-US" noProof="0" smtClean="0"/>
-              <a:t>2026/5/13</a:t>
+              <a:t>2026/7/15</a:t>
             </a:fld>
             <a:endParaRPr lang="ja-JP" altLang="en-US" noProof="0" dirty="0"/>
           </a:p>
@@ -18246,7 +18249,7 @@
           <a:p>
             <a:fld id="{EF64FCAD-9B38-400E-A1E9-727ABA020130}" type="datetime1">
               <a:rPr lang="ja-JP" altLang="en-US" noProof="0" smtClean="0"/>
-              <a:t>2026/5/13</a:t>
+              <a:t>2026/7/15</a:t>
             </a:fld>
             <a:endParaRPr lang="ja-JP" altLang="en-US" noProof="0" dirty="0"/>
           </a:p>
@@ -18765,7 +18768,7 @@
           <a:p>
             <a:fld id="{8C675A3F-BD38-4633-97A4-7E1D298EC843}" type="datetime1">
               <a:rPr lang="ja-JP" altLang="en-US" smtClean="0"/>
-              <a:t>2026/5/13</a:t>
+              <a:t>2026/7/15</a:t>
             </a:fld>
             <a:endParaRPr lang="en-US" dirty="0"/>
           </a:p>
@@ -19499,7 +19502,7 @@
           <a:p>
             <a:fld id="{C9ED8B79-03CD-4D0B-BB9D-1A6B7FD5A0D5}" type="datetime1">
               <a:rPr lang="ja-JP" altLang="en-US" noProof="0" smtClean="0"/>
-              <a:t>2026/5/13</a:t>
+              <a:t>2026/7/15</a:t>
             </a:fld>
             <a:endParaRPr lang="ja-JP" altLang="en-US" noProof="0" dirty="0"/>
           </a:p>
@@ -20061,7 +20064,7 @@
           <a:p>
             <a:fld id="{1EFF0123-6B04-4903-AA9C-F0CF49105591}" type="datetime1">
               <a:rPr lang="ja-JP" altLang="en-US" noProof="0" smtClean="0"/>
-              <a:t>2026/5/13</a:t>
+              <a:t>2026/7/15</a:t>
             </a:fld>
             <a:endParaRPr lang="ja-JP" altLang="en-US" noProof="0" dirty="0"/>
           </a:p>
@@ -20807,7 +20810,7 @@
           <a:p>
             <a:fld id="{522644B3-CB5F-448F-97EB-373148182E69}" type="datetime1">
               <a:rPr lang="ja-JP" altLang="en-US" noProof="0" smtClean="0"/>
-              <a:t>2026/5/13</a:t>
+              <a:t>2026/7/15</a:t>
             </a:fld>
             <a:endParaRPr lang="ja-JP" altLang="en-US" noProof="0" dirty="0"/>
           </a:p>
@@ -21752,6 +21755,529 @@
       </p:grpSpPr>
       <p:sp>
         <p:nvSpPr>
+          <p:cNvPr id="2" name="コンテンツ プレースホルダー 1">
+            <a:extLst>
+              <a:ext uri="{FF2B5EF4-FFF2-40B4-BE49-F238E27FC236}">
+                <a16:creationId xmlns:a16="http://schemas.microsoft.com/office/drawing/2014/main" id="{1ABB9D1B-7CD4-A38C-7EFF-01BDD639ED2C}"/>
+              </a:ext>
+            </a:extLst>
+          </p:cNvPr>
+          <p:cNvSpPr>
+            <a:spLocks noGrp="1"/>
+          </p:cNvSpPr>
+          <p:nvPr>
+            <p:ph idx="1"/>
+          </p:nvPr>
+        </p:nvSpPr>
+        <p:spPr>
+          <a:xfrm>
+            <a:off x="4864607" y="2031121"/>
+            <a:ext cx="6520569" cy="3933150"/>
+          </a:xfrm>
+        </p:spPr>
+        <p:txBody>
+          <a:bodyPr>
+            <a:normAutofit/>
+          </a:bodyPr>
+          <a:lstStyle/>
+          <a:p>
+            <a:r>
+              <a:rPr lang="ja-JP" altLang="en-US" sz="2800" dirty="0"/>
+              <a:t>主には自己分析の補助</a:t>
+            </a:r>
+            <a:endParaRPr lang="en-US" altLang="ja-JP" sz="2800" dirty="0"/>
+          </a:p>
+          <a:p>
+            <a:endParaRPr lang="en-US" altLang="ja-JP" sz="2800" dirty="0"/>
+          </a:p>
+          <a:p>
+            <a:pPr marL="0" indent="0">
+              <a:buNone/>
+            </a:pPr>
+            <a:r>
+              <a:rPr lang="ja-JP" altLang="en-US" sz="2800" dirty="0"/>
+              <a:t>自分一人では洗い出しきれない</a:t>
+            </a:r>
+            <a:endParaRPr lang="en-US" altLang="ja-JP" sz="2800" dirty="0"/>
+          </a:p>
+          <a:p>
+            <a:pPr marL="0" indent="0">
+              <a:buNone/>
+            </a:pPr>
+            <a:r>
+              <a:rPr lang="ja-JP" altLang="en-US" sz="2800" dirty="0"/>
+              <a:t>強みや</a:t>
+            </a:r>
+            <a:r>
+              <a:rPr lang="en-US" altLang="ja-JP" sz="2800" dirty="0"/>
+              <a:t>ES</a:t>
+            </a:r>
+            <a:r>
+              <a:rPr lang="ja-JP" altLang="en-US" sz="2800" dirty="0"/>
+              <a:t>に書くような内容も</a:t>
+            </a:r>
+            <a:endParaRPr lang="en-US" altLang="ja-JP" sz="2800" dirty="0"/>
+          </a:p>
+          <a:p>
+            <a:pPr marL="0" indent="0">
+              <a:buNone/>
+            </a:pPr>
+            <a:r>
+              <a:rPr lang="ja-JP" altLang="en-US" sz="2800" dirty="0"/>
+              <a:t>使用者本人の情報を内部で整理しながら</a:t>
+            </a:r>
+            <a:endParaRPr lang="en-US" altLang="ja-JP" sz="2800" dirty="0"/>
+          </a:p>
+          <a:p>
+            <a:pPr marL="0" indent="0">
+              <a:buNone/>
+            </a:pPr>
+            <a:r>
+              <a:rPr lang="ja-JP" altLang="en-US" sz="2800" dirty="0"/>
+              <a:t>一緒に自己分析を手伝ってくれる</a:t>
+            </a:r>
+            <a:endParaRPr lang="en-US" altLang="ja-JP" sz="2800" dirty="0"/>
+          </a:p>
+        </p:txBody>
+      </p:sp>
+      <p:sp>
+        <p:nvSpPr>
+          <p:cNvPr id="3" name="タイトル 2">
+            <a:extLst>
+              <a:ext uri="{FF2B5EF4-FFF2-40B4-BE49-F238E27FC236}">
+                <a16:creationId xmlns:a16="http://schemas.microsoft.com/office/drawing/2014/main" id="{BD6AAAA7-E1D7-80E1-62F5-9B5FB465A3FB}"/>
+              </a:ext>
+            </a:extLst>
+          </p:cNvPr>
+          <p:cNvSpPr>
+            <a:spLocks noGrp="1"/>
+          </p:cNvSpPr>
+          <p:nvPr>
+            <p:ph type="title"/>
+          </p:nvPr>
+        </p:nvSpPr>
+        <p:spPr>
+          <a:xfrm>
+            <a:off x="5221224" y="893729"/>
+            <a:ext cx="6163954" cy="910492"/>
+          </a:xfrm>
+        </p:spPr>
+        <p:txBody>
+          <a:bodyPr/>
+          <a:lstStyle/>
+          <a:p>
+            <a:r>
+              <a:rPr kumimoji="1" lang="en-US" altLang="ja-JP" dirty="0"/>
+              <a:t>How to use</a:t>
+            </a:r>
+            <a:endParaRPr kumimoji="1" lang="ja-JP" altLang="en-US" dirty="0"/>
+          </a:p>
+        </p:txBody>
+      </p:sp>
+      <p:pic>
+        <p:nvPicPr>
+          <p:cNvPr id="5" name="図 4">
+            <a:extLst>
+              <a:ext uri="{FF2B5EF4-FFF2-40B4-BE49-F238E27FC236}">
+                <a16:creationId xmlns:a16="http://schemas.microsoft.com/office/drawing/2014/main" id="{BBA71D57-B25D-B39A-6B6C-34AE0EF10A6D}"/>
+              </a:ext>
+            </a:extLst>
+          </p:cNvPr>
+          <p:cNvPicPr>
+            <a:picLocks noChangeAspect="1"/>
+          </p:cNvPicPr>
+          <p:nvPr/>
+        </p:nvPicPr>
+        <p:blipFill>
+          <a:blip r:embed="rId2"/>
+          <a:stretch>
+            <a:fillRect/>
+          </a:stretch>
+        </p:blipFill>
+        <p:spPr>
+          <a:xfrm>
+            <a:off x="697094" y="820577"/>
+            <a:ext cx="4057786" cy="4951875"/>
+          </a:xfrm>
+          <a:prstGeom prst="rect">
+            <a:avLst/>
+          </a:prstGeom>
+        </p:spPr>
+      </p:pic>
+    </p:spTree>
+    <p:extLst>
+      <p:ext uri="{BB962C8B-B14F-4D97-AF65-F5344CB8AC3E}">
+        <p14:creationId xmlns:p14="http://schemas.microsoft.com/office/powerpoint/2010/main" val="3357517801"/>
+      </p:ext>
+    </p:extLst>
+  </p:cSld>
+  <p:clrMapOvr>
+    <a:masterClrMapping/>
+  </p:clrMapOvr>
+</p:sld>
+</file>
+
+<file path=ppt/slides/slide12.xml><?xml version="1.0" encoding="utf-8"?>
+<p:sld xmlns:a="http://schemas.openxmlformats.org/drawingml/2006/main" xmlns:r="http://schemas.openxmlformats.org/officeDocument/2006/relationships" xmlns:p="http://schemas.openxmlformats.org/presentationml/2006/main">
+  <p:cSld>
+    <p:spTree>
+      <p:nvGrpSpPr>
+        <p:cNvPr id="1" name="">
+          <a:extLst>
+            <a:ext uri="{FF2B5EF4-FFF2-40B4-BE49-F238E27FC236}">
+              <a16:creationId xmlns:a16="http://schemas.microsoft.com/office/drawing/2014/main" id="{1EFCC4E5-6665-66A2-7E97-F95737DDE8C3}"/>
+            </a:ext>
+          </a:extLst>
+        </p:cNvPr>
+        <p:cNvGrpSpPr/>
+        <p:nvPr/>
+      </p:nvGrpSpPr>
+      <p:grpSpPr>
+        <a:xfrm>
+          <a:off x="0" y="0"/>
+          <a:ext cx="0" cy="0"/>
+          <a:chOff x="0" y="0"/>
+          <a:chExt cx="0" cy="0"/>
+        </a:xfrm>
+      </p:grpSpPr>
+      <p:sp>
+        <p:nvSpPr>
+          <p:cNvPr id="3" name="タイトル 2">
+            <a:extLst>
+              <a:ext uri="{FF2B5EF4-FFF2-40B4-BE49-F238E27FC236}">
+                <a16:creationId xmlns:a16="http://schemas.microsoft.com/office/drawing/2014/main" id="{670E3BF2-4E99-4D25-5F0F-535AAFF33AE9}"/>
+              </a:ext>
+            </a:extLst>
+          </p:cNvPr>
+          <p:cNvSpPr>
+            <a:spLocks noGrp="1"/>
+          </p:cNvSpPr>
+          <p:nvPr>
+            <p:ph type="title"/>
+          </p:nvPr>
+        </p:nvSpPr>
+        <p:spPr>
+          <a:xfrm>
+            <a:off x="1843633" y="657157"/>
+            <a:ext cx="7730637" cy="910492"/>
+          </a:xfrm>
+        </p:spPr>
+        <p:txBody>
+          <a:bodyPr>
+            <a:normAutofit fontScale="90000"/>
+          </a:bodyPr>
+          <a:lstStyle/>
+          <a:p>
+            <a:r>
+              <a:rPr kumimoji="1" lang="ja-JP" altLang="en-US" dirty="0"/>
+              <a:t>使用箇所：ホーム画面</a:t>
+            </a:r>
+            <a:r>
+              <a:rPr lang="en-US" altLang="ja-JP" dirty="0"/>
+              <a:t>,</a:t>
+            </a:r>
+            <a:r>
+              <a:rPr lang="ja-JP" altLang="en-US" dirty="0"/>
+              <a:t>メモ画面</a:t>
+            </a:r>
+            <a:endParaRPr kumimoji="1" lang="ja-JP" altLang="en-US" dirty="0"/>
+          </a:p>
+        </p:txBody>
+      </p:sp>
+      <p:pic>
+        <p:nvPicPr>
+          <p:cNvPr id="5" name="図 4">
+            <a:extLst>
+              <a:ext uri="{FF2B5EF4-FFF2-40B4-BE49-F238E27FC236}">
+                <a16:creationId xmlns:a16="http://schemas.microsoft.com/office/drawing/2014/main" id="{EA5D5387-ABAC-8EFE-AE50-7DDA51462471}"/>
+              </a:ext>
+            </a:extLst>
+          </p:cNvPr>
+          <p:cNvPicPr>
+            <a:picLocks noChangeAspect="1"/>
+          </p:cNvPicPr>
+          <p:nvPr/>
+        </p:nvPicPr>
+        <p:blipFill>
+          <a:blip r:embed="rId2"/>
+          <a:stretch>
+            <a:fillRect/>
+          </a:stretch>
+        </p:blipFill>
+        <p:spPr>
+          <a:xfrm>
+            <a:off x="938254" y="631617"/>
+            <a:ext cx="960884" cy="1172604"/>
+          </a:xfrm>
+          <a:prstGeom prst="rect">
+            <a:avLst/>
+          </a:prstGeom>
+        </p:spPr>
+      </p:pic>
+      <p:pic>
+        <p:nvPicPr>
+          <p:cNvPr id="10" name="図 9">
+            <a:extLst>
+              <a:ext uri="{FF2B5EF4-FFF2-40B4-BE49-F238E27FC236}">
+                <a16:creationId xmlns:a16="http://schemas.microsoft.com/office/drawing/2014/main" id="{E22AA56F-1F5D-5A15-ADDD-20A92B69F936}"/>
+              </a:ext>
+            </a:extLst>
+          </p:cNvPr>
+          <p:cNvPicPr>
+            <a:picLocks noChangeAspect="1"/>
+          </p:cNvPicPr>
+          <p:nvPr/>
+        </p:nvPicPr>
+        <p:blipFill>
+          <a:blip r:embed="rId3"/>
+          <a:stretch>
+            <a:fillRect/>
+          </a:stretch>
+        </p:blipFill>
+        <p:spPr>
+          <a:xfrm>
+            <a:off x="6735820" y="2260156"/>
+            <a:ext cx="4377658" cy="3161266"/>
+          </a:xfrm>
+          <a:prstGeom prst="rect">
+            <a:avLst/>
+          </a:prstGeom>
+          <a:ln>
+            <a:solidFill>
+              <a:schemeClr val="accent1"/>
+            </a:solidFill>
+          </a:ln>
+        </p:spPr>
+      </p:pic>
+      <p:pic>
+        <p:nvPicPr>
+          <p:cNvPr id="8" name="図 7">
+            <a:extLst>
+              <a:ext uri="{FF2B5EF4-FFF2-40B4-BE49-F238E27FC236}">
+                <a16:creationId xmlns:a16="http://schemas.microsoft.com/office/drawing/2014/main" id="{09B697BA-A61F-D403-5D63-E76EB064526F}"/>
+              </a:ext>
+            </a:extLst>
+          </p:cNvPr>
+          <p:cNvPicPr>
+            <a:picLocks noChangeAspect="1"/>
+          </p:cNvPicPr>
+          <p:nvPr/>
+        </p:nvPicPr>
+        <p:blipFill>
+          <a:blip r:embed="rId4"/>
+          <a:stretch>
+            <a:fillRect/>
+          </a:stretch>
+        </p:blipFill>
+        <p:spPr>
+          <a:xfrm>
+            <a:off x="793820" y="1804221"/>
+            <a:ext cx="5872551" cy="4237736"/>
+          </a:xfrm>
+          <a:prstGeom prst="rect">
+            <a:avLst/>
+          </a:prstGeom>
+          <a:ln>
+            <a:solidFill>
+              <a:schemeClr val="accent1"/>
+            </a:solidFill>
+          </a:ln>
+        </p:spPr>
+      </p:pic>
+      <p:sp>
+        <p:nvSpPr>
+          <p:cNvPr id="11" name="楕円 10">
+            <a:extLst>
+              <a:ext uri="{FF2B5EF4-FFF2-40B4-BE49-F238E27FC236}">
+                <a16:creationId xmlns:a16="http://schemas.microsoft.com/office/drawing/2014/main" id="{8F1F06C4-B2EA-71F1-21EB-2BE704C9888A}"/>
+              </a:ext>
+            </a:extLst>
+          </p:cNvPr>
+          <p:cNvSpPr/>
+          <p:nvPr/>
+        </p:nvSpPr>
+        <p:spPr>
+          <a:xfrm>
+            <a:off x="452176" y="4099727"/>
+            <a:ext cx="6471138" cy="1145513"/>
+          </a:xfrm>
+          <a:prstGeom prst="ellipse">
+            <a:avLst/>
+          </a:prstGeom>
+          <a:noFill/>
+          <a:ln w="76200" cap="flat" cmpd="sng" algn="ctr">
+            <a:solidFill>
+              <a:srgbClr val="FF0000"/>
+            </a:solidFill>
+            <a:prstDash val="solid"/>
+            <a:round/>
+            <a:headEnd type="none" w="med" len="med"/>
+            <a:tailEnd type="none" w="med" len="med"/>
+          </a:ln>
+        </p:spPr>
+        <p:style>
+          <a:lnRef idx="0">
+            <a:scrgbClr r="0" g="0" b="0"/>
+          </a:lnRef>
+          <a:fillRef idx="0">
+            <a:scrgbClr r="0" g="0" b="0"/>
+          </a:fillRef>
+          <a:effectRef idx="0">
+            <a:scrgbClr r="0" g="0" b="0"/>
+          </a:effectRef>
+          <a:fontRef idx="minor">
+            <a:schemeClr val="accent1"/>
+          </a:fontRef>
+        </p:style>
+        <p:txBody>
+          <a:bodyPr rtlCol="0" anchor="ctr"/>
+          <a:lstStyle/>
+          <a:p>
+            <a:pPr algn="ctr"/>
+            <a:endParaRPr kumimoji="1" lang="ja-JP" altLang="en-US"/>
+          </a:p>
+        </p:txBody>
+      </p:sp>
+      <p:sp>
+        <p:nvSpPr>
+          <p:cNvPr id="12" name="楕円 11">
+            <a:extLst>
+              <a:ext uri="{FF2B5EF4-FFF2-40B4-BE49-F238E27FC236}">
+                <a16:creationId xmlns:a16="http://schemas.microsoft.com/office/drawing/2014/main" id="{81581794-9040-EAD0-EC34-37DE441EC2B5}"/>
+              </a:ext>
+            </a:extLst>
+          </p:cNvPr>
+          <p:cNvSpPr/>
+          <p:nvPr/>
+        </p:nvSpPr>
+        <p:spPr>
+          <a:xfrm>
+            <a:off x="5158114" y="5523044"/>
+            <a:ext cx="2129654" cy="708626"/>
+          </a:xfrm>
+          <a:prstGeom prst="ellipse">
+            <a:avLst/>
+          </a:prstGeom>
+          <a:noFill/>
+          <a:ln w="76200" cap="flat" cmpd="sng" algn="ctr">
+            <a:solidFill>
+              <a:srgbClr val="FF0000"/>
+            </a:solidFill>
+            <a:prstDash val="solid"/>
+            <a:round/>
+            <a:headEnd type="none" w="med" len="med"/>
+            <a:tailEnd type="none" w="med" len="med"/>
+          </a:ln>
+        </p:spPr>
+        <p:style>
+          <a:lnRef idx="0">
+            <a:scrgbClr r="0" g="0" b="0"/>
+          </a:lnRef>
+          <a:fillRef idx="0">
+            <a:scrgbClr r="0" g="0" b="0"/>
+          </a:fillRef>
+          <a:effectRef idx="0">
+            <a:scrgbClr r="0" g="0" b="0"/>
+          </a:effectRef>
+          <a:fontRef idx="minor">
+            <a:schemeClr val="accent1"/>
+          </a:fontRef>
+        </p:style>
+        <p:txBody>
+          <a:bodyPr rtlCol="0" anchor="ctr"/>
+          <a:lstStyle/>
+          <a:p>
+            <a:pPr algn="ctr"/>
+            <a:endParaRPr kumimoji="1" lang="ja-JP" altLang="en-US"/>
+          </a:p>
+        </p:txBody>
+      </p:sp>
+      <p:sp>
+        <p:nvSpPr>
+          <p:cNvPr id="13" name="楕円 12">
+            <a:extLst>
+              <a:ext uri="{FF2B5EF4-FFF2-40B4-BE49-F238E27FC236}">
+                <a16:creationId xmlns:a16="http://schemas.microsoft.com/office/drawing/2014/main" id="{F7BE47F5-0C5A-EC87-0375-D60CB190E785}"/>
+              </a:ext>
+            </a:extLst>
+          </p:cNvPr>
+          <p:cNvSpPr/>
+          <p:nvPr/>
+        </p:nvSpPr>
+        <p:spPr>
+          <a:xfrm>
+            <a:off x="10263514" y="4672483"/>
+            <a:ext cx="1014086" cy="678079"/>
+          </a:xfrm>
+          <a:prstGeom prst="ellipse">
+            <a:avLst/>
+          </a:prstGeom>
+          <a:noFill/>
+          <a:ln w="76200" cap="flat" cmpd="sng" algn="ctr">
+            <a:solidFill>
+              <a:srgbClr val="FF0000"/>
+            </a:solidFill>
+            <a:prstDash val="solid"/>
+            <a:round/>
+            <a:headEnd type="none" w="med" len="med"/>
+            <a:tailEnd type="none" w="med" len="med"/>
+          </a:ln>
+        </p:spPr>
+        <p:style>
+          <a:lnRef idx="0">
+            <a:scrgbClr r="0" g="0" b="0"/>
+          </a:lnRef>
+          <a:fillRef idx="0">
+            <a:scrgbClr r="0" g="0" b="0"/>
+          </a:fillRef>
+          <a:effectRef idx="0">
+            <a:scrgbClr r="0" g="0" b="0"/>
+          </a:effectRef>
+          <a:fontRef idx="minor">
+            <a:schemeClr val="accent1"/>
+          </a:fontRef>
+        </p:style>
+        <p:txBody>
+          <a:bodyPr rtlCol="0" anchor="ctr"/>
+          <a:lstStyle/>
+          <a:p>
+            <a:pPr algn="ctr"/>
+            <a:endParaRPr kumimoji="1" lang="ja-JP" altLang="en-US"/>
+          </a:p>
+        </p:txBody>
+      </p:sp>
+    </p:spTree>
+    <p:extLst>
+      <p:ext uri="{BB962C8B-B14F-4D97-AF65-F5344CB8AC3E}">
+        <p14:creationId xmlns:p14="http://schemas.microsoft.com/office/powerpoint/2010/main" val="4201305501"/>
+      </p:ext>
+    </p:extLst>
+  </p:cSld>
+  <p:clrMapOvr>
+    <a:masterClrMapping/>
+  </p:clrMapOvr>
+</p:sld>
+</file>
+
+<file path=ppt/slides/slide13.xml><?xml version="1.0" encoding="utf-8"?>
+<p:sld xmlns:a="http://schemas.openxmlformats.org/drawingml/2006/main" xmlns:r="http://schemas.openxmlformats.org/officeDocument/2006/relationships" xmlns:p="http://schemas.openxmlformats.org/presentationml/2006/main">
+  <p:cSld>
+    <p:spTree>
+      <p:nvGrpSpPr>
+        <p:cNvPr id="1" name=""/>
+        <p:cNvGrpSpPr/>
+        <p:nvPr/>
+      </p:nvGrpSpPr>
+      <p:grpSpPr>
+        <a:xfrm>
+          <a:off x="0" y="0"/>
+          <a:ext cx="0" cy="0"/>
+          <a:chOff x="0" y="0"/>
+          <a:chExt cx="0" cy="0"/>
+        </a:xfrm>
+      </p:grpSpPr>
+      <p:sp>
+        <p:nvSpPr>
           <p:cNvPr id="3" name="テキスト プレースホルダー 2">
             <a:extLst>
               <a:ext uri="{FF2B5EF4-FFF2-40B4-BE49-F238E27FC236}">
@@ -22085,7 +22611,309 @@
 </p:sld>
 </file>
 
-<file path=ppt/slides/slide12.xml><?xml version="1.0" encoding="utf-8"?>
+<file path=ppt/slides/slide14.xml><?xml version="1.0" encoding="utf-8"?>
+<p:sld xmlns:a="http://schemas.openxmlformats.org/drawingml/2006/main" xmlns:r="http://schemas.openxmlformats.org/officeDocument/2006/relationships" xmlns:p="http://schemas.openxmlformats.org/presentationml/2006/main">
+  <p:cSld>
+    <p:spTree>
+      <p:nvGrpSpPr>
+        <p:cNvPr id="1" name=""/>
+        <p:cNvGrpSpPr/>
+        <p:nvPr/>
+      </p:nvGrpSpPr>
+      <p:grpSpPr>
+        <a:xfrm>
+          <a:off x="0" y="0"/>
+          <a:ext cx="0" cy="0"/>
+          <a:chOff x="0" y="0"/>
+          <a:chExt cx="0" cy="0"/>
+        </a:xfrm>
+      </p:grpSpPr>
+      <p:sp>
+        <p:nvSpPr>
+          <p:cNvPr id="2" name="タイトル 1">
+            <a:extLst>
+              <a:ext uri="{FF2B5EF4-FFF2-40B4-BE49-F238E27FC236}">
+                <a16:creationId xmlns:a16="http://schemas.microsoft.com/office/drawing/2014/main" id="{8AE55A5C-1F42-9F0D-E7DF-C9DB43387787}"/>
+              </a:ext>
+            </a:extLst>
+          </p:cNvPr>
+          <p:cNvSpPr>
+            <a:spLocks noGrp="1"/>
+          </p:cNvSpPr>
+          <p:nvPr>
+            <p:ph type="title"/>
+          </p:nvPr>
+        </p:nvSpPr>
+        <p:spPr/>
+        <p:txBody>
+          <a:bodyPr/>
+          <a:lstStyle/>
+          <a:p>
+            <a:r>
+              <a:rPr kumimoji="1" lang="ja-JP" altLang="en-US" dirty="0"/>
+              <a:t>今後の展望</a:t>
+            </a:r>
+          </a:p>
+        </p:txBody>
+      </p:sp>
+      <p:sp>
+        <p:nvSpPr>
+          <p:cNvPr id="3" name="テキスト ボックス 2">
+            <a:extLst>
+              <a:ext uri="{FF2B5EF4-FFF2-40B4-BE49-F238E27FC236}">
+                <a16:creationId xmlns:a16="http://schemas.microsoft.com/office/drawing/2014/main" id="{F3F0DEAE-8E1F-7BF6-124C-401047C59F85}"/>
+              </a:ext>
+            </a:extLst>
+          </p:cNvPr>
+          <p:cNvSpPr txBox="1"/>
+          <p:nvPr/>
+        </p:nvSpPr>
+        <p:spPr>
+          <a:xfrm>
+            <a:off x="932329" y="1929384"/>
+            <a:ext cx="9564624" cy="4524315"/>
+          </a:xfrm>
+          <a:prstGeom prst="rect">
+            <a:avLst/>
+          </a:prstGeom>
+          <a:noFill/>
+        </p:spPr>
+        <p:txBody>
+          <a:bodyPr wrap="square" rtlCol="0">
+            <a:spAutoFit/>
+          </a:bodyPr>
+          <a:lstStyle/>
+          <a:p>
+            <a:r>
+              <a:rPr kumimoji="1" lang="ja-JP" altLang="en-US" sz="3600" dirty="0">
+                <a:solidFill>
+                  <a:schemeClr val="bg1"/>
+                </a:solidFill>
+              </a:rPr>
+              <a:t>・</a:t>
+            </a:r>
+            <a:r>
+              <a:rPr kumimoji="1" lang="en-US" altLang="ja-JP" sz="3600" dirty="0">
+                <a:solidFill>
+                  <a:schemeClr val="bg1"/>
+                </a:solidFill>
+              </a:rPr>
+              <a:t>UI</a:t>
+            </a:r>
+            <a:r>
+              <a:rPr kumimoji="1" lang="ja-JP" altLang="en-US" sz="3600" dirty="0">
+                <a:solidFill>
+                  <a:schemeClr val="bg1"/>
+                </a:solidFill>
+              </a:rPr>
+              <a:t>の整え</a:t>
+            </a:r>
+            <a:endParaRPr kumimoji="1" lang="en-US" altLang="ja-JP" sz="3600" dirty="0">
+              <a:solidFill>
+                <a:schemeClr val="bg1"/>
+              </a:solidFill>
+            </a:endParaRPr>
+          </a:p>
+          <a:p>
+            <a:r>
+              <a:rPr kumimoji="1" lang="ja-JP" altLang="en-US" sz="3600" dirty="0">
+                <a:solidFill>
+                  <a:schemeClr val="bg1"/>
+                </a:solidFill>
+              </a:rPr>
+              <a:t>・広告を付けることでマネタイズを確保し、</a:t>
+            </a:r>
+            <a:endParaRPr kumimoji="1" lang="en-US" altLang="ja-JP" sz="3600" dirty="0">
+              <a:solidFill>
+                <a:schemeClr val="bg1"/>
+              </a:solidFill>
+            </a:endParaRPr>
+          </a:p>
+          <a:p>
+            <a:r>
+              <a:rPr kumimoji="1" lang="ja-JP" altLang="en-US" sz="3600" dirty="0">
+                <a:solidFill>
+                  <a:schemeClr val="bg1"/>
+                </a:solidFill>
+              </a:rPr>
+              <a:t>　</a:t>
+            </a:r>
+            <a:r>
+              <a:rPr kumimoji="1" lang="en-US" altLang="ja-JP" sz="3600" dirty="0">
+                <a:solidFill>
+                  <a:schemeClr val="bg1"/>
+                </a:solidFill>
+              </a:rPr>
+              <a:t>AI</a:t>
+            </a:r>
+            <a:r>
+              <a:rPr kumimoji="1" lang="ja-JP" altLang="en-US" sz="3600" dirty="0">
+                <a:solidFill>
+                  <a:schemeClr val="bg1"/>
+                </a:solidFill>
+              </a:rPr>
+              <a:t>の</a:t>
+            </a:r>
+            <a:r>
+              <a:rPr kumimoji="1" lang="en-US" altLang="ja-JP" sz="3600" dirty="0">
+                <a:solidFill>
+                  <a:schemeClr val="bg1"/>
+                </a:solidFill>
+              </a:rPr>
+              <a:t>API</a:t>
+            </a:r>
+            <a:r>
+              <a:rPr kumimoji="1" lang="ja-JP" altLang="en-US" sz="3600" dirty="0">
+                <a:solidFill>
+                  <a:schemeClr val="bg1"/>
+                </a:solidFill>
+              </a:rPr>
+              <a:t>をより利用しやすいものに変える</a:t>
+            </a:r>
+            <a:r>
+              <a:rPr kumimoji="1" lang="en-US" altLang="ja-JP" sz="3600" dirty="0">
+                <a:solidFill>
+                  <a:schemeClr val="bg1"/>
+                </a:solidFill>
+              </a:rPr>
+              <a:t>(AWS</a:t>
+            </a:r>
+            <a:r>
+              <a:rPr kumimoji="1" lang="ja-JP" altLang="en-US" sz="3600" dirty="0">
+                <a:solidFill>
+                  <a:schemeClr val="bg1"/>
+                </a:solidFill>
+              </a:rPr>
+              <a:t>など</a:t>
+            </a:r>
+            <a:r>
+              <a:rPr kumimoji="1" lang="en-US" altLang="ja-JP" sz="3600" dirty="0">
+                <a:solidFill>
+                  <a:schemeClr val="bg1"/>
+                </a:solidFill>
+              </a:rPr>
+              <a:t>)</a:t>
+            </a:r>
+          </a:p>
+          <a:p>
+            <a:r>
+              <a:rPr kumimoji="1" lang="ja-JP" altLang="en-US" sz="3600" dirty="0">
+                <a:solidFill>
+                  <a:schemeClr val="bg1"/>
+                </a:solidFill>
+              </a:rPr>
+              <a:t>・それぞれモバイル版</a:t>
+            </a:r>
+            <a:r>
+              <a:rPr kumimoji="1" lang="en-US" altLang="ja-JP" sz="3600" dirty="0">
+                <a:solidFill>
+                  <a:schemeClr val="bg1"/>
+                </a:solidFill>
+              </a:rPr>
+              <a:t>(</a:t>
+            </a:r>
+            <a:r>
+              <a:rPr kumimoji="1" lang="en-US" altLang="ja-JP" sz="3600" dirty="0" err="1">
+                <a:solidFill>
+                  <a:schemeClr val="bg1"/>
+                </a:solidFill>
+              </a:rPr>
+              <a:t>Android,iOS</a:t>
+            </a:r>
+            <a:r>
+              <a:rPr kumimoji="1" lang="en-US" altLang="ja-JP" sz="3600" dirty="0">
+                <a:solidFill>
+                  <a:schemeClr val="bg1"/>
+                </a:solidFill>
+              </a:rPr>
+              <a:t>)</a:t>
+            </a:r>
+            <a:r>
+              <a:rPr kumimoji="1" lang="ja-JP" altLang="en-US" sz="3600" dirty="0">
+                <a:solidFill>
+                  <a:schemeClr val="bg1"/>
+                </a:solidFill>
+              </a:rPr>
+              <a:t>に</a:t>
+            </a:r>
+            <a:endParaRPr kumimoji="1" lang="en-US" altLang="ja-JP" sz="3600" dirty="0">
+              <a:solidFill>
+                <a:schemeClr val="bg1"/>
+              </a:solidFill>
+            </a:endParaRPr>
+          </a:p>
+          <a:p>
+            <a:r>
+              <a:rPr kumimoji="1" lang="ja-JP" altLang="en-US" sz="3600" dirty="0">
+                <a:solidFill>
+                  <a:schemeClr val="bg1"/>
+                </a:solidFill>
+              </a:rPr>
+              <a:t>　対応した画面サイズにする</a:t>
+            </a:r>
+            <a:endParaRPr kumimoji="1" lang="en-US" altLang="ja-JP" sz="3600" dirty="0">
+              <a:solidFill>
+                <a:schemeClr val="bg1"/>
+              </a:solidFill>
+            </a:endParaRPr>
+          </a:p>
+          <a:p>
+            <a:r>
+              <a:rPr kumimoji="1" lang="ja-JP" altLang="en-US" sz="3600" dirty="0">
+                <a:solidFill>
+                  <a:schemeClr val="bg1"/>
+                </a:solidFill>
+              </a:rPr>
+              <a:t>・タスクページの追加</a:t>
+            </a:r>
+            <a:endParaRPr kumimoji="1" lang="en-US" altLang="ja-JP" sz="3600">
+              <a:solidFill>
+                <a:schemeClr val="bg1"/>
+              </a:solidFill>
+            </a:endParaRPr>
+          </a:p>
+          <a:p>
+            <a:r>
+              <a:rPr kumimoji="1" lang="en-US" altLang="ja-JP" sz="3600">
+                <a:solidFill>
+                  <a:schemeClr val="bg1"/>
+                </a:solidFill>
+              </a:rPr>
+              <a:t>(</a:t>
+            </a:r>
+            <a:r>
+              <a:rPr kumimoji="1" lang="ja-JP" altLang="en-US" sz="3600" dirty="0">
+                <a:solidFill>
+                  <a:schemeClr val="bg1"/>
+                </a:solidFill>
+              </a:rPr>
+              <a:t>リマインダーのまとめ</a:t>
+            </a:r>
+            <a:r>
+              <a:rPr kumimoji="1" lang="en-US" altLang="ja-JP" sz="3600" dirty="0">
+                <a:solidFill>
+                  <a:schemeClr val="bg1"/>
+                </a:solidFill>
+              </a:rPr>
+              <a:t>)</a:t>
+            </a:r>
+          </a:p>
+        </p:txBody>
+      </p:sp>
+    </p:spTree>
+    <p:extLst>
+      <p:ext uri="{BB962C8B-B14F-4D97-AF65-F5344CB8AC3E}">
+        <p14:creationId xmlns:p14="http://schemas.microsoft.com/office/powerpoint/2010/main" val="3474400490"/>
+      </p:ext>
+    </p:extLst>
+  </p:cSld>
+  <p:clrMapOvr>
+    <a:masterClrMapping/>
+  </p:clrMapOvr>
+</p:sld>
+</file>
+
+<file path=ppt/slides/slide15.xml><?xml version="1.0" encoding="utf-8"?>
 <p:sld xmlns:a="http://schemas.openxmlformats.org/drawingml/2006/main" xmlns:r="http://schemas.openxmlformats.org/officeDocument/2006/relationships" xmlns:p="http://schemas.openxmlformats.org/presentationml/2006/main">
   <p:cSld>
     <p:spTree>
@@ -22173,35 +23001,6 @@
         </p:blipFill>
         <p:spPr/>
       </p:pic>
-      <p:sp>
-        <p:nvSpPr>
-          <p:cNvPr id="4" name="コンテンツ プレースホルダー 3">
-            <a:extLst>
-              <a:ext uri="{FF2B5EF4-FFF2-40B4-BE49-F238E27FC236}">
-                <a16:creationId xmlns:a16="http://schemas.microsoft.com/office/drawing/2014/main" id="{0298BF91-C42E-0AA0-88A4-CFCE8E70AEF5}"/>
-              </a:ext>
-            </a:extLst>
-          </p:cNvPr>
-          <p:cNvSpPr>
-            <a:spLocks noGrp="1"/>
-          </p:cNvSpPr>
-          <p:nvPr>
-            <p:ph idx="1"/>
-          </p:nvPr>
-        </p:nvSpPr>
-        <p:spPr/>
-        <p:txBody>
-          <a:bodyPr/>
-          <a:lstStyle/>
-          <a:p>
-            <a:r>
-              <a:rPr lang="ja-JP" altLang="en-US" dirty="0"/>
-              <a:t>ここら辺になにかしら画像を載せる</a:t>
-            </a:r>
-            <a:endParaRPr lang="en-US" altLang="ja-JP" dirty="0"/>
-          </a:p>
-        </p:txBody>
-      </p:sp>
     </p:spTree>
     <p:extLst>
       <p:ext uri="{BB962C8B-B14F-4D97-AF65-F5344CB8AC3E}">
@@ -22449,10 +23248,6 @@
             <a:pPr marL="0" indent="0" rtl="0">
               <a:buNone/>
             </a:pPr>
-            <a:r>
-              <a:rPr lang="ja-JP" altLang="en-US" dirty="0"/>
-              <a:t>ここで説明する</a:t>
-            </a:r>
             <a:endParaRPr lang="en-US" altLang="ja-JP" dirty="0"/>
           </a:p>
         </p:txBody>
@@ -24650,6 +25445,15 @@
 </file>
 
 <file path=customXml/item1.xml><?xml version="1.0" encoding="utf-8"?>
+<?mso-contentType ?>
+<FormTemplates xmlns="http://schemas.microsoft.com/sharepoint/v3/contenttype/forms">
+  <Display>DocumentLibraryForm</Display>
+  <Edit>DocumentLibraryForm</Edit>
+  <New>DocumentLibraryForm</New>
+</FormTemplates>
+</file>
+
+<file path=customXml/item2.xml><?xml version="1.0" encoding="utf-8"?>
 <ct:contentTypeSchema xmlns:ct="http://schemas.microsoft.com/office/2006/metadata/contentType" xmlns:ma="http://schemas.microsoft.com/office/2006/metadata/properties/metaAttributes" ct:_="" ma:_="" ma:contentTypeName="ドキュメント" ma:contentTypeID="0x010100EDB961CF66848D4AB4A1C7D5A07FFE0D" ma:contentTypeVersion="11" ma:contentTypeDescription="新しいドキュメントを作成します。" ma:contentTypeScope="" ma:versionID="1af7698bdc28c85334a4dd70b98d8778">
   <xsd:schema xmlns:xsd="http://www.w3.org/2001/XMLSchema" xmlns:xs="http://www.w3.org/2001/XMLSchema" xmlns:p="http://schemas.microsoft.com/office/2006/metadata/properties" xmlns:ns3="d9da7bd8-af51-43f2-9535-1e5448c4b97e" targetNamespace="http://schemas.microsoft.com/office/2006/metadata/properties" ma:root="true" ma:fieldsID="e8c1b4e60a47d1d0591cc9a0be4cabaf" ns3:_="">
     <xsd:import namespace="d9da7bd8-af51-43f2-9535-1e5448c4b97e"/>
@@ -24837,15 +25641,6 @@
 </ct:contentTypeSchema>
 </file>
 
-<file path=customXml/item2.xml><?xml version="1.0" encoding="utf-8"?>
-<?mso-contentType ?>
-<FormTemplates xmlns="http://schemas.microsoft.com/sharepoint/v3/contenttype/forms">
-  <Display>DocumentLibraryForm</Display>
-  <Edit>DocumentLibraryForm</Edit>
-  <New>DocumentLibraryForm</New>
-</FormTemplates>
-</file>
-
 <file path=customXml/item3.xml><?xml version="1.0" encoding="utf-8"?>
 <p:properties xmlns:p="http://schemas.microsoft.com/office/2006/metadata/properties" xmlns:xsi="http://www.w3.org/2001/XMLSchema-instance" xmlns:pc="http://schemas.microsoft.com/office/infopath/2007/PartnerControls">
   <documentManagement>
@@ -24855,6 +25650,14 @@
 </file>
 
 <file path=customXml/itemProps1.xml><?xml version="1.0" encoding="utf-8"?>
+<ds:datastoreItem xmlns:ds="http://schemas.openxmlformats.org/officeDocument/2006/customXml" ds:itemID="{921AD9DE-7424-4E63-8315-92C7F471649F}">
+  <ds:schemaRefs>
+    <ds:schemaRef ds:uri="http://schemas.microsoft.com/sharepoint/v3/contenttype/forms"/>
+  </ds:schemaRefs>
+</ds:datastoreItem>
+</file>
+
+<file path=customXml/itemProps2.xml><?xml version="1.0" encoding="utf-8"?>
 <ds:datastoreItem xmlns:ds="http://schemas.openxmlformats.org/officeDocument/2006/customXml" ds:itemID="{E3745551-8B74-41FB-B278-777E1052CC99}">
   <ds:schemaRefs>
     <ds:schemaRef ds:uri="http://schemas.microsoft.com/office/2006/metadata/contentType"/>
@@ -24868,14 +25671,6 @@
     <ds:schemaRef ds:uri="http://purl.org/dc/elements/1.1/"/>
     <ds:schemaRef ds:uri="http://purl.org/dc/terms/"/>
     <ds:schemaRef ds:uri="http://schemas.microsoft.com/internal/obd"/>
-  </ds:schemaRefs>
-</ds:datastoreItem>
-</file>
-
-<file path=customXml/itemProps2.xml><?xml version="1.0" encoding="utf-8"?>
-<ds:datastoreItem xmlns:ds="http://schemas.openxmlformats.org/officeDocument/2006/customXml" ds:itemID="{921AD9DE-7424-4E63-8315-92C7F471649F}">
-  <ds:schemaRefs>
-    <ds:schemaRef ds:uri="http://schemas.microsoft.com/sharepoint/v3/contenttype/forms"/>
   </ds:schemaRefs>
 </ds:datastoreItem>
 </file>
